--- a/24300120183_陈一璟_lab1-5/Lab1_5FPGA_ALU.pptx
+++ b/24300120183_陈一璟_lab1-5/Lab1_5FPGA_ALU.pptx
@@ -1434,7 +1434,7 @@
         <a:spcBef>
           <a:spcPts val="1000"/>
         </a:spcBef>
-        <a:buFont typeface="Arial" panose="020B0604020202090204" pitchFamily="34" charset="0"/>
+        <a:buFont typeface="Arial" panose="020B0604020202020204" pitchFamily="34" charset="0"/>
         <a:buChar char="•"/>
         <a:defRPr sz="2800" kern="1200">
           <a:solidFill>
@@ -1452,7 +1452,7 @@
         <a:spcBef>
           <a:spcPts val="500"/>
         </a:spcBef>
-        <a:buFont typeface="Arial" panose="020B0604020202090204" pitchFamily="34" charset="0"/>
+        <a:buFont typeface="Arial" panose="020B0604020202020204" pitchFamily="34" charset="0"/>
         <a:buChar char="•"/>
         <a:defRPr sz="2400" kern="1200">
           <a:solidFill>
@@ -1470,7 +1470,7 @@
         <a:spcBef>
           <a:spcPts val="500"/>
         </a:spcBef>
-        <a:buFont typeface="Arial" panose="020B0604020202090204" pitchFamily="34" charset="0"/>
+        <a:buFont typeface="Arial" panose="020B0604020202020204" pitchFamily="34" charset="0"/>
         <a:buChar char="•"/>
         <a:defRPr sz="2000" kern="1200">
           <a:solidFill>
@@ -1488,7 +1488,7 @@
         <a:spcBef>
           <a:spcPts val="500"/>
         </a:spcBef>
-        <a:buFont typeface="Arial" panose="020B0604020202090204" pitchFamily="34" charset="0"/>
+        <a:buFont typeface="Arial" panose="020B0604020202020204" pitchFamily="34" charset="0"/>
         <a:buChar char="•"/>
         <a:defRPr sz="1800" kern="1200">
           <a:solidFill>
@@ -1506,7 +1506,7 @@
         <a:spcBef>
           <a:spcPts val="500"/>
         </a:spcBef>
-        <a:buFont typeface="Arial" panose="020B0604020202090204" pitchFamily="34" charset="0"/>
+        <a:buFont typeface="Arial" panose="020B0604020202020204" pitchFamily="34" charset="0"/>
         <a:buChar char="•"/>
         <a:defRPr sz="1800" kern="1200">
           <a:solidFill>
@@ -1524,7 +1524,7 @@
         <a:spcBef>
           <a:spcPts val="500"/>
         </a:spcBef>
-        <a:buFont typeface="Arial" panose="020B0604020202090204" pitchFamily="34" charset="0"/>
+        <a:buFont typeface="Arial" panose="020B0604020202020204" pitchFamily="34" charset="0"/>
         <a:buChar char="•"/>
         <a:defRPr sz="1800" kern="1200">
           <a:solidFill>
@@ -1542,7 +1542,7 @@
         <a:spcBef>
           <a:spcPts val="500"/>
         </a:spcBef>
-        <a:buFont typeface="Arial" panose="020B0604020202090204" pitchFamily="34" charset="0"/>
+        <a:buFont typeface="Arial" panose="020B0604020202020204" pitchFamily="34" charset="0"/>
         <a:buChar char="•"/>
         <a:defRPr sz="1800" kern="1200">
           <a:solidFill>
@@ -1560,7 +1560,7 @@
         <a:spcBef>
           <a:spcPts val="500"/>
         </a:spcBef>
-        <a:buFont typeface="Arial" panose="020B0604020202090204" pitchFamily="34" charset="0"/>
+        <a:buFont typeface="Arial" panose="020B0604020202020204" pitchFamily="34" charset="0"/>
         <a:buChar char="•"/>
         <a:defRPr sz="1800" kern="1200">
           <a:solidFill>
@@ -1578,7 +1578,7 @@
         <a:spcBef>
           <a:spcPts val="500"/>
         </a:spcBef>
-        <a:buFont typeface="Arial" panose="020B0604020202090204" pitchFamily="34" charset="0"/>
+        <a:buFont typeface="Arial" panose="020B0604020202020204" pitchFamily="34" charset="0"/>
         <a:buChar char="•"/>
         <a:defRPr sz="1800" kern="1200">
           <a:solidFill>
@@ -2709,10 +2709,22 @@
             </a:r>
             <a:r>
               <a:rPr lang="zh-CN" altLang="en-US" sz="2400" dirty="0"/>
-              <a:t>（值为 </a:t>
-            </a:r>
-            <a:r>
-              <a:rPr lang="en-US" altLang="zh-CN" sz="2400" dirty="0"/>
+              <a:t>（</a:t>
+            </a:r>
+            <a:r>
+              <a:rPr lang="zh-CN" altLang="en-US" sz="2400" dirty="0">
+                <a:highlight>
+                  <a:srgbClr val="FFFF00"/>
+                </a:highlight>
+              </a:rPr>
+              <a:t>值为 </a:t>
+            </a:r>
+            <a:r>
+              <a:rPr lang="en-US" altLang="zh-CN" sz="2400" dirty="0">
+                <a:highlight>
+                  <a:srgbClr val="FFFF00"/>
+                </a:highlight>
+              </a:rPr>
               <a:t>32’h03</a:t>
             </a:r>
             <a:r>

--- a/24300120183_陈一璟_lab1-5/Lab1_5FPGA_ALU.pptx
+++ b/24300120183_陈一璟_lab1-5/Lab1_5FPGA_ALU.pptx
@@ -2754,23 +2754,43 @@
               <a:t>将 </a:t>
             </a:r>
             <a:r>
-              <a:rPr lang="en-US" altLang="zh-CN" sz="2400" dirty="0"/>
+              <a:rPr lang="en-US" altLang="zh-CN" sz="2400" dirty="0">
+                <a:highlight>
+                  <a:srgbClr val="FFFF00"/>
+                </a:highlight>
+              </a:rPr>
               <a:t>sw0~sw7 (sw7</a:t>
             </a:r>
             <a:r>
-              <a:rPr lang="zh-CN" altLang="en-US" sz="2400" dirty="0"/>
+              <a:rPr lang="zh-CN" altLang="en-US" sz="2400" dirty="0">
+                <a:highlight>
+                  <a:srgbClr val="FFFF00"/>
+                </a:highlight>
+              </a:rPr>
               <a:t>为高位</a:t>
             </a:r>
             <a:r>
-              <a:rPr lang="en-US" altLang="zh-CN" sz="2400" dirty="0"/>
+              <a:rPr lang="en-US" altLang="zh-CN" sz="2400" dirty="0">
+                <a:highlight>
+                  <a:srgbClr val="FFFF00"/>
+                </a:highlight>
+              </a:rPr>
               <a:t>)</a:t>
             </a:r>
             <a:r>
-              <a:rPr lang="zh-CN" altLang="en-US" sz="2400" dirty="0"/>
+              <a:rPr lang="zh-CN" altLang="en-US" sz="2400" dirty="0">
+                <a:highlight>
+                  <a:srgbClr val="FFFF00"/>
+                </a:highlight>
+              </a:rPr>
               <a:t>输入 </a:t>
             </a:r>
             <a:r>
-              <a:rPr lang="en-US" altLang="zh-CN" sz="2400" dirty="0"/>
+              <a:rPr lang="en-US" altLang="zh-CN" sz="2400" dirty="0">
+                <a:highlight>
+                  <a:srgbClr val="FFFF00"/>
+                </a:highlight>
+              </a:rPr>
               <a:t>num1</a:t>
             </a:r>
             <a:r>
@@ -2824,44 +2844,92 @@
               <a:t>位数控制。将 </a:t>
             </a:r>
             <a:r>
-              <a:rPr lang="en-US" altLang="zh-CN" sz="2400" dirty="0"/>
+              <a:rPr lang="en-US" altLang="zh-CN" sz="2400" dirty="0">
+                <a:highlight>
+                  <a:srgbClr val="FFFF00"/>
+                </a:highlight>
+              </a:rPr>
               <a:t>sw15</a:t>
             </a:r>
             <a:r>
+              <a:rPr lang="zh-CN" altLang="en-US" sz="2400" dirty="0">
+                <a:highlight>
+                  <a:srgbClr val="FFFF00"/>
+                </a:highlight>
+              </a:rPr>
+              <a:t>作为</a:t>
+            </a:r>
+            <a:r>
+              <a:rPr lang="en-US" altLang="zh-CN" sz="2400" dirty="0">
+                <a:highlight>
+                  <a:srgbClr val="FFFF00"/>
+                </a:highlight>
+              </a:rPr>
+              <a:t>reset</a:t>
+            </a:r>
+            <a:r>
+              <a:rPr lang="zh-CN" altLang="en-US" sz="2400" dirty="0">
+                <a:highlight>
+                  <a:srgbClr val="FFFF00"/>
+                </a:highlight>
+              </a:rPr>
+              <a:t>复位信号</a:t>
+            </a:r>
+            <a:r>
               <a:rPr lang="zh-CN" altLang="en-US" sz="2400" dirty="0"/>
-              <a:t>作为</a:t>
-            </a:r>
-            <a:r>
-              <a:rPr lang="en-US" altLang="zh-CN" sz="2400" dirty="0"/>
-              <a:t>reset</a:t>
+              <a:t>，高电平有效。</a:t>
+            </a:r>
+            <a:r>
+              <a:rPr lang="en-US" altLang="zh-CN" sz="2400" dirty="0">
+                <a:highlight>
+                  <a:srgbClr val="FFFF00"/>
+                </a:highlight>
+              </a:rPr>
+              <a:t>sw12~sw14(sw14</a:t>
+            </a:r>
+            <a:r>
+              <a:rPr lang="zh-CN" altLang="en-US" sz="2400" dirty="0">
+                <a:highlight>
+                  <a:srgbClr val="FFFF00"/>
+                </a:highlight>
+              </a:rPr>
+              <a:t>为高位</a:t>
+            </a:r>
+            <a:r>
+              <a:rPr lang="en-US" altLang="zh-CN" sz="2400" dirty="0">
+                <a:highlight>
+                  <a:srgbClr val="FFFF00"/>
+                </a:highlight>
+              </a:rPr>
+              <a:t>)</a:t>
+            </a:r>
+            <a:r>
+              <a:rPr lang="zh-CN" altLang="en-US" sz="2400" dirty="0">
+                <a:highlight>
+                  <a:srgbClr val="FFFF00"/>
+                </a:highlight>
+              </a:rPr>
+              <a:t>到 </a:t>
+            </a:r>
+            <a:r>
+              <a:rPr lang="en-US" altLang="zh-CN" sz="2400" dirty="0">
+                <a:highlight>
+                  <a:srgbClr val="FFFF00"/>
+                </a:highlight>
+              </a:rPr>
+              <a:t>op </a:t>
+            </a:r>
+            <a:r>
+              <a:rPr lang="zh-CN" altLang="en-US" sz="2400" dirty="0">
+                <a:highlight>
+                  <a:srgbClr val="FFFF00"/>
+                </a:highlight>
+              </a:rPr>
+              <a:t>作为运算器的控制信号</a:t>
             </a:r>
             <a:r>
               <a:rPr lang="zh-CN" altLang="en-US" sz="2400" dirty="0"/>
-              <a:t>复位信号，高电平有效。</a:t>
-            </a:r>
-            <a:r>
-              <a:rPr lang="en-US" altLang="zh-CN" sz="2400" dirty="0"/>
-              <a:t>sw12~sw14(sw14</a:t>
-            </a:r>
-            <a:r>
-              <a:rPr lang="zh-CN" altLang="en-US" sz="2400" dirty="0"/>
-              <a:t>为高位</a:t>
-            </a:r>
-            <a:r>
-              <a:rPr lang="en-US" altLang="zh-CN" sz="2400" dirty="0"/>
-              <a:t>)</a:t>
-            </a:r>
-            <a:r>
-              <a:rPr lang="zh-CN" altLang="en-US" sz="2400" dirty="0"/>
-              <a:t>到 </a:t>
-            </a:r>
-            <a:r>
-              <a:rPr lang="en-US" altLang="zh-CN" sz="2400" dirty="0"/>
-              <a:t>op </a:t>
-            </a:r>
-            <a:r>
-              <a:rPr lang="zh-CN" altLang="en-US" sz="2400" dirty="0"/>
-              <a:t>作为运算器的控制信号；  </a:t>
+              <a:t>；  </a:t>
             </a:r>
             <a:endParaRPr lang="zh-CN" altLang="en-US" sz="2400" dirty="0"/>
           </a:p>
